--- a/material/Sesion-02-Blockchain-Web3.pptx
+++ b/material/Sesion-02-Blockchain-Web3.pptx
@@ -546,7 +546,7 @@
           <a:p>
             <a:r>
               <a:rPr lang="en-US" dirty="0"/>
-              <a:t/>
+              <a:t>Abrir con la plenaria de la pregunta de la semana de la Sesión 1. Anunciar el formato de hoy: demostración en vivo, billetera propia, teoría del hash y código en parejas. Comprobar quién llegó sin entorno. 2 minutos.</a:t>
             </a:r>
             <a:endParaRPr lang="en-US" dirty="0"/>
           </a:p>
@@ -722,7 +722,7 @@
           <a:p>
             <a:r>
               <a:rPr lang="en-US" dirty="0"/>
-              <a:t/>
+              <a:t>Min 70–112. Exposición dialogada: qué es un hash, qué propiedades debe cumplir y cómo un árbol de Merkle resume un conjunto. Todo lo de este bloque se ejecuta después en el bloque D.</a:t>
             </a:r>
             <a:endParaRPr lang="en-US" dirty="0"/>
           </a:p>
@@ -2306,7 +2306,7 @@
           <a:p>
             <a:r>
               <a:rPr lang="en-US" dirty="0"/>
-              <a:t/>
+              <a:t>Después de la pausa, min 120–170, en parejas. Verificar primero que cada pareja tenga Python o Node funcionando; si no, emparejar con quien sí. El código se entrega completo: se lee, se ejecuta y se rompe.</a:t>
             </a:r>
             <a:endParaRPr lang="en-US" dirty="0"/>
           </a:p>
@@ -3362,7 +3362,7 @@
           <a:p>
             <a:r>
               <a:rPr lang="en-US" dirty="0"/>
-              <a:t/>
+              <a:t>Min 170–180. Síntesis, entregable y lo que viene en la Sesión 3. No abrir temas nuevos.</a:t>
             </a:r>
             <a:endParaRPr lang="en-US" dirty="0"/>
           </a:p>
@@ -3978,7 +3978,7 @@
           <a:p>
             <a:r>
               <a:rPr lang="en-US" dirty="0"/>
-              <a:t/>
+              <a:t>Cerrar con la próxima sesión: firmas digitales y la mini-blockchain. Recordar el entregable (repositorio con la suite de pruebas pasando, antes de que empiece la Sesión 3) y que el laboratorio 02 trae una dependencia nueva que hay que instalar antes. 1 minuto.</a:t>
             </a:r>
             <a:endParaRPr lang="en-US" dirty="0"/>
           </a:p>
@@ -4066,7 +4066,7 @@
           <a:p>
             <a:r>
               <a:rPr lang="en-US" dirty="0"/>
-              <a:t/>
+              <a:t>Min 10–55. El docente ejecuta y narra; ustedes miran y anotan. Todo ocurre en red de prueba: nunca dinero real.</a:t>
             </a:r>
             <a:endParaRPr lang="en-US" dirty="0"/>
           </a:p>
@@ -4330,7 +4330,7 @@
           <a:p>
             <a:r>
               <a:rPr lang="en-US" dirty="0"/>
-              <a:t/>
+              <a:t>Min 55–70. Cada estudiante crea su billetera justo después de verla crear. La frase semilla va en papel, nunca en foto ni en archivo, y no se comparte con nadie, tampoco con el docente.</a:t>
             </a:r>
             <a:endParaRPr lang="en-US" dirty="0"/>
           </a:p>
@@ -12073,8 +12073,8 @@
         </p:nvSpPr>
         <p:spPr>
           <a:xfrm>
-            <a:off x="566928" y="4983480"/>
-            <a:ext cx="11057839" cy="960120"/>
+            <a:off x="566928" y="4937760"/>
+            <a:ext cx="11057839" cy="1143000"/>
           </a:xfrm>
           <a:prstGeom prst="rect">
             <a:avLst/>
@@ -12113,7 +12113,7 @@
         </p:blipFill>
         <p:spPr>
           <a:xfrm>
-            <a:off x="804672" y="5202936"/>
+            <a:off x="804672" y="5157216"/>
             <a:ext cx="237744" cy="237744"/>
           </a:xfrm>
           <a:prstGeom prst="rect">
@@ -12129,7 +12129,7 @@
         </p:nvSpPr>
         <p:spPr>
           <a:xfrm>
-            <a:off x="1133856" y="5175504"/>
+            <a:off x="1133856" y="5129784"/>
             <a:ext cx="10234879" cy="292608"/>
           </a:xfrm>
           <a:prstGeom prst="rect">
@@ -12168,7 +12168,7 @@
         </p:nvSpPr>
         <p:spPr>
           <a:xfrm>
-            <a:off x="804672" y="5495544"/>
+            <a:off x="804672" y="5449824"/>
             <a:ext cx="10582351" cy="411480"/>
           </a:xfrm>
           <a:prstGeom prst="rect">
@@ -14181,7 +14181,7 @@
         </p:nvSpPr>
         <p:spPr>
           <a:xfrm>
-            <a:off x="566928" y="2148840"/>
+            <a:off x="566928" y="2057400"/>
             <a:ext cx="731520" cy="457200"/>
           </a:xfrm>
           <a:prstGeom prst="rect">
@@ -14220,7 +14220,7 @@
         </p:nvSpPr>
         <p:spPr>
           <a:xfrm>
-            <a:off x="1435608" y="2103120"/>
+            <a:off x="1435608" y="2011680"/>
             <a:ext cx="4572000" cy="365760"/>
           </a:xfrm>
           <a:prstGeom prst="rect">
@@ -14259,7 +14259,7 @@
         </p:nvSpPr>
         <p:spPr>
           <a:xfrm>
-            <a:off x="6144768" y="2084832"/>
+            <a:off x="6144768" y="1993392"/>
             <a:ext cx="5479999" cy="1005840"/>
           </a:xfrm>
           <a:prstGeom prst="rect">
@@ -14301,7 +14301,7 @@
         </p:nvSpPr>
         <p:spPr>
           <a:xfrm>
-            <a:off x="566928" y="1938528"/>
+            <a:off x="566928" y="1847088"/>
             <a:ext cx="11057839" cy="0"/>
           </a:xfrm>
           <a:prstGeom prst="line">
@@ -14324,7 +14324,7 @@
         </p:nvSpPr>
         <p:spPr>
           <a:xfrm>
-            <a:off x="566928" y="3383280"/>
+            <a:off x="566928" y="3154680"/>
             <a:ext cx="731520" cy="457200"/>
           </a:xfrm>
           <a:prstGeom prst="rect">
@@ -14363,7 +14363,7 @@
         </p:nvSpPr>
         <p:spPr>
           <a:xfrm>
-            <a:off x="1435608" y="3337560"/>
+            <a:off x="1435608" y="3108960"/>
             <a:ext cx="4572000" cy="365760"/>
           </a:xfrm>
           <a:prstGeom prst="rect">
@@ -14402,7 +14402,7 @@
         </p:nvSpPr>
         <p:spPr>
           <a:xfrm>
-            <a:off x="6144768" y="3319272"/>
+            <a:off x="6144768" y="3090672"/>
             <a:ext cx="5479999" cy="1005840"/>
           </a:xfrm>
           <a:prstGeom prst="rect">
@@ -14444,7 +14444,7 @@
         </p:nvSpPr>
         <p:spPr>
           <a:xfrm>
-            <a:off x="566928" y="3172968"/>
+            <a:off x="566928" y="2944368"/>
             <a:ext cx="11057839" cy="0"/>
           </a:xfrm>
           <a:prstGeom prst="line">
@@ -14467,7 +14467,7 @@
         </p:nvSpPr>
         <p:spPr>
           <a:xfrm>
-            <a:off x="566928" y="4617720"/>
+            <a:off x="566928" y="4251960"/>
             <a:ext cx="731520" cy="457200"/>
           </a:xfrm>
           <a:prstGeom prst="rect">
@@ -14506,7 +14506,7 @@
         </p:nvSpPr>
         <p:spPr>
           <a:xfrm>
-            <a:off x="1435608" y="4572000"/>
+            <a:off x="1435608" y="4206240"/>
             <a:ext cx="4572000" cy="365760"/>
           </a:xfrm>
           <a:prstGeom prst="rect">
@@ -14545,7 +14545,7 @@
         </p:nvSpPr>
         <p:spPr>
           <a:xfrm>
-            <a:off x="6144768" y="4553712"/>
+            <a:off x="6144768" y="4187952"/>
             <a:ext cx="5479999" cy="1005840"/>
           </a:xfrm>
           <a:prstGeom prst="rect">
@@ -14587,7 +14587,7 @@
         </p:nvSpPr>
         <p:spPr>
           <a:xfrm>
-            <a:off x="566928" y="4407408"/>
+            <a:off x="566928" y="4041648"/>
             <a:ext cx="11057839" cy="0"/>
           </a:xfrm>
           <a:prstGeom prst="line">
@@ -14610,7 +14610,7 @@
         </p:nvSpPr>
         <p:spPr>
           <a:xfrm>
-            <a:off x="566928" y="5641848"/>
+            <a:off x="566928" y="5138928"/>
             <a:ext cx="11057839" cy="0"/>
           </a:xfrm>
           <a:prstGeom prst="line">
@@ -14633,7 +14633,7 @@
         </p:nvSpPr>
         <p:spPr>
           <a:xfrm>
-            <a:off x="566928" y="5486400"/>
+            <a:off x="566928" y="5303520"/>
             <a:ext cx="11057839" cy="822960"/>
           </a:xfrm>
           <a:prstGeom prst="rect">
@@ -14673,7 +14673,7 @@
         </p:blipFill>
         <p:spPr>
           <a:xfrm>
-            <a:off x="804672" y="5705856"/>
+            <a:off x="804672" y="5522976"/>
             <a:ext cx="237744" cy="237744"/>
           </a:xfrm>
           <a:prstGeom prst="rect">
@@ -14689,7 +14689,7 @@
         </p:nvSpPr>
         <p:spPr>
           <a:xfrm>
-            <a:off x="1133856" y="5678424"/>
+            <a:off x="1133856" y="5495544"/>
             <a:ext cx="10234879" cy="292608"/>
           </a:xfrm>
           <a:prstGeom prst="rect">
@@ -14728,7 +14728,7 @@
         </p:nvSpPr>
         <p:spPr>
           <a:xfrm>
-            <a:off x="804672" y="5943600"/>
+            <a:off x="804672" y="5760720"/>
             <a:ext cx="10582351" cy="365760"/>
           </a:xfrm>
           <a:prstGeom prst="rect">
@@ -14756,7 +14756,7 @@
                 <a:ea typeface="Arial" pitchFamily="34" charset="-122"/>
                 <a:cs typeface="Arial" pitchFamily="34" charset="-120"/>
               </a:rPr>
-              <a:t>Trabaja en pareja con alguien que sí lo tenga, y resuelve su instalación fuera de clase.</a:t>
+              <a:t>Trabajen en pareja con alguien que sí lo tenga, y resuelvan su instalación fuera de clase.</a:t>
             </a:r>
             <a:endParaRPr lang="en-US" sz="1250" dirty="0"/>
           </a:p>
@@ -15073,7 +15073,7 @@
           </p:nvPr>
         </p:nvGraphicFramePr>
         <p:xfrm>
-          <a:off x="566928" y="2240280"/>
+          <a:off x="566928" y="2340864"/>
           <a:ext cx="11057839" cy="914400"/>
         </p:xfrm>
         <a:graphic>
@@ -15291,7 +15291,7 @@
                   </a:tcPr>
                 </a:tc>
               </a:tr>
-              <a:tr h="896112">
+              <a:tr h="873252">
                 <a:tc>
                   <a:txBody>
                     <a:bodyPr/>
@@ -15497,7 +15497,7 @@
                   </a:tcPr>
                 </a:tc>
               </a:tr>
-              <a:tr h="896112">
+              <a:tr h="873252">
                 <a:tc>
                   <a:txBody>
                     <a:bodyPr/>
@@ -15715,8 +15715,8 @@
         </p:nvSpPr>
         <p:spPr>
           <a:xfrm>
-            <a:off x="548640" y="2221992"/>
-            <a:ext cx="11094415" cy="2139696"/>
+            <a:off x="548640" y="2322576"/>
+            <a:ext cx="11094415" cy="2093976"/>
           </a:xfrm>
           <a:prstGeom prst="rect">
             <a:avLst/>
@@ -19953,8 +19953,8 @@
         </p:nvSpPr>
         <p:spPr>
           <a:xfrm>
-            <a:off x="566928" y="4983480"/>
-            <a:ext cx="11057839" cy="960120"/>
+            <a:off x="566928" y="4937760"/>
+            <a:ext cx="11057839" cy="1143000"/>
           </a:xfrm>
           <a:prstGeom prst="rect">
             <a:avLst/>
@@ -19993,7 +19993,7 @@
         </p:blipFill>
         <p:spPr>
           <a:xfrm>
-            <a:off x="804672" y="5202936"/>
+            <a:off x="804672" y="5157216"/>
             <a:ext cx="237744" cy="237744"/>
           </a:xfrm>
           <a:prstGeom prst="rect">
@@ -20009,7 +20009,7 @@
         </p:nvSpPr>
         <p:spPr>
           <a:xfrm>
-            <a:off x="1133856" y="5175504"/>
+            <a:off x="1133856" y="5129784"/>
             <a:ext cx="10234879" cy="292608"/>
           </a:xfrm>
           <a:prstGeom prst="rect">
@@ -20048,7 +20048,7 @@
         </p:nvSpPr>
         <p:spPr>
           <a:xfrm>
-            <a:off x="804672" y="5495544"/>
+            <a:off x="804672" y="5449824"/>
             <a:ext cx="10582351" cy="411480"/>
           </a:xfrm>
           <a:prstGeom prst="rect">
@@ -20393,7 +20393,7 @@
           </p:nvPr>
         </p:nvGraphicFramePr>
         <p:xfrm>
-          <a:off x="566928" y="2286000"/>
+          <a:off x="566928" y="2377440"/>
           <a:ext cx="11057839" cy="914400"/>
         </p:xfrm>
         <a:graphic>
@@ -20611,7 +20611,7 @@
                   </a:tcPr>
                 </a:tc>
               </a:tr>
-              <a:tr h="459486">
+              <a:tr h="448056">
                 <a:tc>
                   <a:txBody>
                     <a:bodyPr/>
@@ -20817,7 +20817,7 @@
                   </a:tcPr>
                 </a:tc>
               </a:tr>
-              <a:tr h="459486">
+              <a:tr h="448056">
                 <a:tc>
                   <a:txBody>
                     <a:bodyPr/>
@@ -21023,7 +21023,7 @@
                   </a:tcPr>
                 </a:tc>
               </a:tr>
-              <a:tr h="459486">
+              <a:tr h="448056">
                 <a:tc>
                   <a:txBody>
                     <a:bodyPr/>
@@ -21229,7 +21229,7 @@
                   </a:tcPr>
                 </a:tc>
               </a:tr>
-              <a:tr h="459486">
+              <a:tr h="448056">
                 <a:tc>
                   <a:txBody>
                     <a:bodyPr/>
@@ -21447,8 +21447,8 @@
         </p:nvSpPr>
         <p:spPr>
           <a:xfrm>
-            <a:off x="548640" y="2267712"/>
-            <a:ext cx="11094415" cy="2185416"/>
+            <a:off x="548640" y="2359152"/>
+            <a:ext cx="11094415" cy="2139696"/>
           </a:xfrm>
           <a:prstGeom prst="rect">
             <a:avLst/>
@@ -22877,7 +22877,7 @@
         </p:nvSpPr>
         <p:spPr>
           <a:xfrm>
-            <a:off x="566928" y="2596896"/>
+            <a:off x="566928" y="2542032"/>
             <a:ext cx="640080" cy="402336"/>
           </a:xfrm>
           <a:prstGeom prst="rect">
@@ -22916,7 +22916,7 @@
         </p:nvSpPr>
         <p:spPr>
           <a:xfrm>
-            <a:off x="1298448" y="2560320"/>
+            <a:off x="1298448" y="2505456"/>
             <a:ext cx="4114800" cy="329184"/>
           </a:xfrm>
           <a:prstGeom prst="rect">
@@ -22955,8 +22955,8 @@
         </p:nvSpPr>
         <p:spPr>
           <a:xfrm>
-            <a:off x="5596128" y="2542032"/>
-            <a:ext cx="6028639" cy="731520"/>
+            <a:off x="5596128" y="2487168"/>
+            <a:ext cx="6028639" cy="603504"/>
           </a:xfrm>
           <a:prstGeom prst="rect">
             <a:avLst/>
@@ -22997,7 +22997,7 @@
         </p:nvSpPr>
         <p:spPr>
           <a:xfrm>
-            <a:off x="566928" y="2432304"/>
+            <a:off x="566928" y="2377440"/>
             <a:ext cx="11057839" cy="0"/>
           </a:xfrm>
           <a:prstGeom prst="line">
@@ -23020,7 +23020,7 @@
         </p:nvSpPr>
         <p:spPr>
           <a:xfrm>
-            <a:off x="566928" y="3465576"/>
+            <a:off x="566928" y="3273552"/>
             <a:ext cx="640080" cy="402336"/>
           </a:xfrm>
           <a:prstGeom prst="rect">
@@ -23059,7 +23059,7 @@
         </p:nvSpPr>
         <p:spPr>
           <a:xfrm>
-            <a:off x="1298448" y="3429000"/>
+            <a:off x="1298448" y="3236976"/>
             <a:ext cx="4114800" cy="329184"/>
           </a:xfrm>
           <a:prstGeom prst="rect">
@@ -23098,8 +23098,8 @@
         </p:nvSpPr>
         <p:spPr>
           <a:xfrm>
-            <a:off x="5596128" y="3410712"/>
-            <a:ext cx="6028639" cy="731520"/>
+            <a:off x="5596128" y="3218688"/>
+            <a:ext cx="6028639" cy="603504"/>
           </a:xfrm>
           <a:prstGeom prst="rect">
             <a:avLst/>
@@ -23140,7 +23140,7 @@
         </p:nvSpPr>
         <p:spPr>
           <a:xfrm>
-            <a:off x="566928" y="3300984"/>
+            <a:off x="566928" y="3108960"/>
             <a:ext cx="11057839" cy="0"/>
           </a:xfrm>
           <a:prstGeom prst="line">
@@ -23163,7 +23163,7 @@
         </p:nvSpPr>
         <p:spPr>
           <a:xfrm>
-            <a:off x="566928" y="4334256"/>
+            <a:off x="566928" y="4005072"/>
             <a:ext cx="640080" cy="402336"/>
           </a:xfrm>
           <a:prstGeom prst="rect">
@@ -23202,7 +23202,7 @@
         </p:nvSpPr>
         <p:spPr>
           <a:xfrm>
-            <a:off x="1298448" y="4297680"/>
+            <a:off x="1298448" y="3968496"/>
             <a:ext cx="4114800" cy="329184"/>
           </a:xfrm>
           <a:prstGeom prst="rect">
@@ -23241,8 +23241,8 @@
         </p:nvSpPr>
         <p:spPr>
           <a:xfrm>
-            <a:off x="5596128" y="4279392"/>
-            <a:ext cx="6028639" cy="731520"/>
+            <a:off x="5596128" y="3950208"/>
+            <a:ext cx="6028639" cy="603504"/>
           </a:xfrm>
           <a:prstGeom prst="rect">
             <a:avLst/>
@@ -23283,7 +23283,7 @@
         </p:nvSpPr>
         <p:spPr>
           <a:xfrm>
-            <a:off x="566928" y="4169664"/>
+            <a:off x="566928" y="3840480"/>
             <a:ext cx="11057839" cy="0"/>
           </a:xfrm>
           <a:prstGeom prst="line">
@@ -23306,7 +23306,7 @@
         </p:nvSpPr>
         <p:spPr>
           <a:xfrm>
-            <a:off x="566928" y="5202936"/>
+            <a:off x="566928" y="4736592"/>
             <a:ext cx="640080" cy="402336"/>
           </a:xfrm>
           <a:prstGeom prst="rect">
@@ -23345,7 +23345,7 @@
         </p:nvSpPr>
         <p:spPr>
           <a:xfrm>
-            <a:off x="1298448" y="5166360"/>
+            <a:off x="1298448" y="4700016"/>
             <a:ext cx="4114800" cy="329184"/>
           </a:xfrm>
           <a:prstGeom prst="rect">
@@ -23384,8 +23384,8 @@
         </p:nvSpPr>
         <p:spPr>
           <a:xfrm>
-            <a:off x="5596128" y="5148072"/>
-            <a:ext cx="6028639" cy="731520"/>
+            <a:off x="5596128" y="4681728"/>
+            <a:ext cx="6028639" cy="603504"/>
           </a:xfrm>
           <a:prstGeom prst="rect">
             <a:avLst/>
@@ -23426,7 +23426,7 @@
         </p:nvSpPr>
         <p:spPr>
           <a:xfrm>
-            <a:off x="566928" y="5038344"/>
+            <a:off x="566928" y="4572000"/>
             <a:ext cx="11057839" cy="0"/>
           </a:xfrm>
           <a:prstGeom prst="line">
@@ -23449,7 +23449,7 @@
         </p:nvSpPr>
         <p:spPr>
           <a:xfrm>
-            <a:off x="566928" y="5907024"/>
+            <a:off x="566928" y="5303520"/>
             <a:ext cx="11057839" cy="0"/>
           </a:xfrm>
           <a:prstGeom prst="line">
@@ -23472,7 +23472,7 @@
         </p:nvSpPr>
         <p:spPr>
           <a:xfrm>
-            <a:off x="566928" y="5532120"/>
+            <a:off x="566928" y="5376672"/>
             <a:ext cx="11057839" cy="777240"/>
           </a:xfrm>
           <a:prstGeom prst="rect">
@@ -23512,7 +23512,7 @@
         </p:blipFill>
         <p:spPr>
           <a:xfrm>
-            <a:off x="804672" y="5751576"/>
+            <a:off x="804672" y="5596128"/>
             <a:ext cx="237744" cy="237744"/>
           </a:xfrm>
           <a:prstGeom prst="rect">
@@ -23528,7 +23528,7 @@
         </p:nvSpPr>
         <p:spPr>
           <a:xfrm>
-            <a:off x="1133856" y="5724144"/>
+            <a:off x="1133856" y="5568696"/>
             <a:ext cx="10234879" cy="292608"/>
           </a:xfrm>
           <a:prstGeom prst="rect">
@@ -23567,7 +23567,7 @@
         </p:nvSpPr>
         <p:spPr>
           <a:xfrm>
-            <a:off x="804672" y="5971032"/>
+            <a:off x="804672" y="5815584"/>
             <a:ext cx="10582351" cy="365760"/>
           </a:xfrm>
           <a:prstGeom prst="rect">
@@ -30546,7 +30546,7 @@
         </p:nvSpPr>
         <p:spPr>
           <a:xfrm>
-            <a:off x="566928" y="2322576"/>
+            <a:off x="566928" y="2276856"/>
             <a:ext cx="640080" cy="402336"/>
           </a:xfrm>
           <a:prstGeom prst="rect">
@@ -30585,7 +30585,7 @@
         </p:nvSpPr>
         <p:spPr>
           <a:xfrm>
-            <a:off x="1298448" y="2286000"/>
+            <a:off x="1298448" y="2240280"/>
             <a:ext cx="3200400" cy="329184"/>
           </a:xfrm>
           <a:prstGeom prst="rect">
@@ -30624,8 +30624,8 @@
         </p:nvSpPr>
         <p:spPr>
           <a:xfrm>
-            <a:off x="4681728" y="2267712"/>
-            <a:ext cx="6943039" cy="868680"/>
+            <a:off x="4681728" y="2221992"/>
+            <a:ext cx="6943039" cy="658368"/>
           </a:xfrm>
           <a:prstGeom prst="rect">
             <a:avLst/>
@@ -30686,7 +30686,7 @@
         </p:nvSpPr>
         <p:spPr>
           <a:xfrm>
-            <a:off x="566928" y="2157984"/>
+            <a:off x="566928" y="2112264"/>
             <a:ext cx="11057839" cy="0"/>
           </a:xfrm>
           <a:prstGeom prst="line">
@@ -30709,7 +30709,7 @@
         </p:nvSpPr>
         <p:spPr>
           <a:xfrm>
-            <a:off x="566928" y="3310128"/>
+            <a:off x="566928" y="3063240"/>
             <a:ext cx="640080" cy="402336"/>
           </a:xfrm>
           <a:prstGeom prst="rect">
@@ -30748,7 +30748,7 @@
         </p:nvSpPr>
         <p:spPr>
           <a:xfrm>
-            <a:off x="1298448" y="3273552"/>
+            <a:off x="1298448" y="3026664"/>
             <a:ext cx="3200400" cy="329184"/>
           </a:xfrm>
           <a:prstGeom prst="rect">
@@ -30787,8 +30787,8 @@
         </p:nvSpPr>
         <p:spPr>
           <a:xfrm>
-            <a:off x="4681728" y="3255264"/>
-            <a:ext cx="6943039" cy="868680"/>
+            <a:off x="4681728" y="3008376"/>
+            <a:ext cx="6943039" cy="658368"/>
           </a:xfrm>
           <a:prstGeom prst="rect">
             <a:avLst/>
@@ -30829,7 +30829,7 @@
         </p:nvSpPr>
         <p:spPr>
           <a:xfrm>
-            <a:off x="566928" y="3145536"/>
+            <a:off x="566928" y="2898648"/>
             <a:ext cx="11057839" cy="0"/>
           </a:xfrm>
           <a:prstGeom prst="line">
@@ -30852,7 +30852,7 @@
         </p:nvSpPr>
         <p:spPr>
           <a:xfrm>
-            <a:off x="566928" y="4297680"/>
+            <a:off x="566928" y="3849624"/>
             <a:ext cx="640080" cy="402336"/>
           </a:xfrm>
           <a:prstGeom prst="rect">
@@ -30891,7 +30891,7 @@
         </p:nvSpPr>
         <p:spPr>
           <a:xfrm>
-            <a:off x="1298448" y="4261104"/>
+            <a:off x="1298448" y="3813048"/>
             <a:ext cx="3200400" cy="329184"/>
           </a:xfrm>
           <a:prstGeom prst="rect">
@@ -30930,8 +30930,8 @@
         </p:nvSpPr>
         <p:spPr>
           <a:xfrm>
-            <a:off x="4681728" y="4242816"/>
-            <a:ext cx="6943039" cy="868680"/>
+            <a:off x="4681728" y="3794760"/>
+            <a:ext cx="6943039" cy="658368"/>
           </a:xfrm>
           <a:prstGeom prst="rect">
             <a:avLst/>
@@ -30972,7 +30972,7 @@
         </p:nvSpPr>
         <p:spPr>
           <a:xfrm>
-            <a:off x="566928" y="4133088"/>
+            <a:off x="566928" y="3685032"/>
             <a:ext cx="11057839" cy="0"/>
           </a:xfrm>
           <a:prstGeom prst="line">
@@ -30995,7 +30995,7 @@
         </p:nvSpPr>
         <p:spPr>
           <a:xfrm>
-            <a:off x="566928" y="5285232"/>
+            <a:off x="566928" y="4636008"/>
             <a:ext cx="640080" cy="402336"/>
           </a:xfrm>
           <a:prstGeom prst="rect">
@@ -31034,7 +31034,7 @@
         </p:nvSpPr>
         <p:spPr>
           <a:xfrm>
-            <a:off x="1298448" y="5248656"/>
+            <a:off x="1298448" y="4599432"/>
             <a:ext cx="3200400" cy="329184"/>
           </a:xfrm>
           <a:prstGeom prst="rect">
@@ -31073,8 +31073,8 @@
         </p:nvSpPr>
         <p:spPr>
           <a:xfrm>
-            <a:off x="4681728" y="5230368"/>
-            <a:ext cx="6943039" cy="868680"/>
+            <a:off x="4681728" y="4581144"/>
+            <a:ext cx="6943039" cy="658368"/>
           </a:xfrm>
           <a:prstGeom prst="rect">
             <a:avLst/>
@@ -31115,7 +31115,7 @@
         </p:nvSpPr>
         <p:spPr>
           <a:xfrm>
-            <a:off x="566928" y="5120640"/>
+            <a:off x="566928" y="4471416"/>
             <a:ext cx="11057839" cy="0"/>
           </a:xfrm>
           <a:prstGeom prst="line">
@@ -31138,7 +31138,7 @@
         </p:nvSpPr>
         <p:spPr>
           <a:xfrm>
-            <a:off x="566928" y="6108192"/>
+            <a:off x="566928" y="5257800"/>
             <a:ext cx="11057839" cy="0"/>
           </a:xfrm>
           <a:prstGeom prst="line">
@@ -31161,8 +31161,8 @@
         </p:nvSpPr>
         <p:spPr>
           <a:xfrm>
-            <a:off x="566928" y="5532120"/>
-            <a:ext cx="11057839" cy="777240"/>
+            <a:off x="566928" y="5413248"/>
+            <a:ext cx="11057839" cy="658368"/>
           </a:xfrm>
           <a:prstGeom prst="rect">
             <a:avLst/>
@@ -31193,8 +31193,8 @@
         </p:nvSpPr>
         <p:spPr>
           <a:xfrm>
-            <a:off x="795528" y="5532120"/>
-            <a:ext cx="10600639" cy="777240"/>
+            <a:off x="795528" y="5413248"/>
+            <a:ext cx="10600639" cy="658368"/>
           </a:xfrm>
           <a:prstGeom prst="rect">
             <a:avLst/>
@@ -31528,8 +31528,8 @@
         </p:nvSpPr>
         <p:spPr>
           <a:xfrm>
-            <a:off x="566928" y="2514600"/>
-            <a:ext cx="5419192" cy="1188720"/>
+            <a:off x="566928" y="2423160"/>
+            <a:ext cx="5419192" cy="1115568"/>
           </a:xfrm>
           <a:prstGeom prst="rect">
             <a:avLst/>
@@ -31553,7 +31553,7 @@
         </p:nvSpPr>
         <p:spPr>
           <a:xfrm>
-            <a:off x="841248" y="2660904"/>
+            <a:off x="841248" y="2569464"/>
             <a:ext cx="4870552" cy="274320"/>
           </a:xfrm>
           <a:prstGeom prst="rect">
@@ -31592,7 +31592,7 @@
         </p:nvSpPr>
         <p:spPr>
           <a:xfrm>
-            <a:off x="841248" y="2990088"/>
+            <a:off x="841248" y="2898648"/>
             <a:ext cx="4870552" cy="640080"/>
           </a:xfrm>
           <a:prstGeom prst="rect">
@@ -31634,8 +31634,8 @@
         </p:nvSpPr>
         <p:spPr>
           <a:xfrm>
-            <a:off x="6205576" y="2514600"/>
-            <a:ext cx="5419192" cy="1188720"/>
+            <a:off x="6205576" y="2423160"/>
+            <a:ext cx="5419192" cy="1115568"/>
           </a:xfrm>
           <a:prstGeom prst="rect">
             <a:avLst/>
@@ -31659,7 +31659,7 @@
         </p:nvSpPr>
         <p:spPr>
           <a:xfrm>
-            <a:off x="6479896" y="2660904"/>
+            <a:off x="6479896" y="2569464"/>
             <a:ext cx="4870552" cy="274320"/>
           </a:xfrm>
           <a:prstGeom prst="rect">
@@ -31698,7 +31698,7 @@
         </p:nvSpPr>
         <p:spPr>
           <a:xfrm>
-            <a:off x="6479896" y="2990088"/>
+            <a:off x="6479896" y="2898648"/>
             <a:ext cx="4870552" cy="640080"/>
           </a:xfrm>
           <a:prstGeom prst="rect">
@@ -31740,8 +31740,8 @@
         </p:nvSpPr>
         <p:spPr>
           <a:xfrm>
-            <a:off x="566928" y="3886200"/>
-            <a:ext cx="5419192" cy="1188720"/>
+            <a:off x="566928" y="3703320"/>
+            <a:ext cx="5419192" cy="1115568"/>
           </a:xfrm>
           <a:prstGeom prst="rect">
             <a:avLst/>
@@ -31765,7 +31765,7 @@
         </p:nvSpPr>
         <p:spPr>
           <a:xfrm>
-            <a:off x="841248" y="4032504"/>
+            <a:off x="841248" y="3849624"/>
             <a:ext cx="4870552" cy="274320"/>
           </a:xfrm>
           <a:prstGeom prst="rect">
@@ -31804,7 +31804,7 @@
         </p:nvSpPr>
         <p:spPr>
           <a:xfrm>
-            <a:off x="841248" y="4361688"/>
+            <a:off x="841248" y="4178808"/>
             <a:ext cx="4870552" cy="640080"/>
           </a:xfrm>
           <a:prstGeom prst="rect">
@@ -31846,8 +31846,8 @@
         </p:nvSpPr>
         <p:spPr>
           <a:xfrm>
-            <a:off x="6205576" y="3886200"/>
-            <a:ext cx="5419192" cy="1188720"/>
+            <a:off x="6205576" y="3703320"/>
+            <a:ext cx="5419192" cy="1115568"/>
           </a:xfrm>
           <a:prstGeom prst="rect">
             <a:avLst/>
@@ -31878,7 +31878,7 @@
         </p:nvSpPr>
         <p:spPr>
           <a:xfrm>
-            <a:off x="6479896" y="4032504"/>
+            <a:off x="6479896" y="3849624"/>
             <a:ext cx="4870552" cy="274320"/>
           </a:xfrm>
           <a:prstGeom prst="rect">
@@ -31917,7 +31917,7 @@
         </p:nvSpPr>
         <p:spPr>
           <a:xfrm>
-            <a:off x="6479896" y="4361688"/>
+            <a:off x="6479896" y="4178808"/>
             <a:ext cx="4870552" cy="640080"/>
           </a:xfrm>
           <a:prstGeom prst="rect">
@@ -31959,8 +31959,8 @@
         </p:nvSpPr>
         <p:spPr>
           <a:xfrm>
-            <a:off x="566928" y="5349240"/>
-            <a:ext cx="11057839" cy="914400"/>
+            <a:off x="566928" y="4983480"/>
+            <a:ext cx="11057839" cy="1143000"/>
           </a:xfrm>
           <a:prstGeom prst="rect">
             <a:avLst/>
@@ -31999,7 +31999,7 @@
         </p:blipFill>
         <p:spPr>
           <a:xfrm>
-            <a:off x="804672" y="5568696"/>
+            <a:off x="804672" y="5202936"/>
             <a:ext cx="237744" cy="237744"/>
           </a:xfrm>
           <a:prstGeom prst="rect">
@@ -32015,7 +32015,7 @@
         </p:nvSpPr>
         <p:spPr>
           <a:xfrm>
-            <a:off x="1133856" y="5541264"/>
+            <a:off x="1133856" y="5175504"/>
             <a:ext cx="10234879" cy="292608"/>
           </a:xfrm>
           <a:prstGeom prst="rect">
@@ -32054,8 +32054,8 @@
         </p:nvSpPr>
         <p:spPr>
           <a:xfrm>
-            <a:off x="804672" y="5843016"/>
-            <a:ext cx="10582351" cy="384048"/>
+            <a:off x="804672" y="5477256"/>
+            <a:ext cx="10582351" cy="548640"/>
           </a:xfrm>
           <a:prstGeom prst="rect">
             <a:avLst/>
@@ -38938,120 +38938,13 @@
       </p:sp>
       <p:sp>
         <p:nvSpPr>
-          <p:cNvPr id="29" name="Text 26"/>
-          <p:cNvSpPr/>
-          <p:nvPr/>
-        </p:nvSpPr>
-        <p:spPr>
-          <a:xfrm>
-            <a:off x="566928" y="5605272"/>
-            <a:ext cx="2377440" cy="329184"/>
-          </a:xfrm>
-          <a:prstGeom prst="rect">
-            <a:avLst/>
-          </a:prstGeom>
-          <a:noFill/>
-          <a:ln/>
-        </p:spPr>
-        <p:txBody>
-          <a:bodyPr wrap="square" lIns="0" tIns="0" rIns="0" bIns="0" rtlCol="0" anchor="t"/>
-          <a:lstStyle/>
-          <a:p>
-            <a:pPr indent="0" marL="0">
-              <a:lnSpc>
-                <a:spcPct val="105000"/>
-              </a:lnSpc>
-              <a:buNone/>
-            </a:pPr>
-            <a:r>
-              <a:rPr lang="en-US" sz="1050" b="1" dirty="0">
-                <a:solidFill>
-                  <a:srgbClr val="0F0F11"/>
-                </a:solidFill>
-                <a:latin typeface="Courier New" pitchFamily="34" charset="0"/>
-                <a:ea typeface="Courier New" pitchFamily="34" charset="-122"/>
-                <a:cs typeface="Courier New" pitchFamily="34" charset="-120"/>
-              </a:rPr>
-              <a:t>Paradoja del cumpleaños</a:t>
-            </a:r>
-            <a:endParaRPr lang="en-US" sz="1050" dirty="0"/>
-          </a:p>
-        </p:txBody>
-      </p:sp>
-      <p:sp>
-        <p:nvSpPr>
-          <p:cNvPr id="30" name="Text 27"/>
-          <p:cNvSpPr/>
-          <p:nvPr/>
-        </p:nvSpPr>
-        <p:spPr>
-          <a:xfrm>
-            <a:off x="4818888" y="5577840"/>
-            <a:ext cx="6805879" cy="512064"/>
-          </a:xfrm>
-          <a:prstGeom prst="rect">
-            <a:avLst/>
-          </a:prstGeom>
-          <a:noFill/>
-          <a:ln/>
-        </p:spPr>
-        <p:txBody>
-          <a:bodyPr wrap="square" lIns="0" tIns="0" rIns="0" bIns="0" rtlCol="0" anchor="t"/>
-          <a:lstStyle/>
-          <a:p>
-            <a:pPr indent="0" marL="0">
-              <a:lnSpc>
-                <a:spcPct val="124000"/>
-              </a:lnSpc>
-              <a:buNone/>
-            </a:pPr>
-            <a:r>
-              <a:rPr lang="en-US" sz="1150" dirty="0">
-                <a:solidFill>
-                  <a:srgbClr val="3A3844"/>
-                </a:solidFill>
-                <a:latin typeface="Arial" pitchFamily="34" charset="0"/>
-                <a:ea typeface="Arial" pitchFamily="34" charset="-122"/>
-                <a:cs typeface="Arial" pitchFamily="34" charset="-120"/>
-              </a:rPr>
-              <a:t>Fenómeno por el cual hallar cualquier coincidencia dentro de un conjunto es mucho más barato que hallar una coincidencia con un elemento fijo. Explica que la resistencia a colisiones sea del orden de 2ⁿ/².</a:t>
-            </a:r>
-            <a:endParaRPr lang="en-US" sz="1150" dirty="0"/>
-          </a:p>
-        </p:txBody>
-      </p:sp>
-      <p:sp>
-        <p:nvSpPr>
-          <p:cNvPr id="31" name="Shape 28"/>
+          <p:cNvPr id="29" name="Shape 26"/>
           <p:cNvSpPr/>
           <p:nvPr/>
         </p:nvSpPr>
         <p:spPr>
           <a:xfrm>
             <a:off x="566928" y="5495544"/>
-            <a:ext cx="11057839" cy="0"/>
-          </a:xfrm>
-          <a:prstGeom prst="line">
-            <a:avLst/>
-          </a:prstGeom>
-          <a:noFill/>
-          <a:ln w="12700">
-            <a:solidFill>
-              <a:srgbClr val="D9D6E0"/>
-            </a:solidFill>
-            <a:prstDash val="solid"/>
-          </a:ln>
-        </p:spPr>
-      </p:sp>
-      <p:sp>
-        <p:nvSpPr>
-          <p:cNvPr id="32" name="Shape 29"/>
-          <p:cNvSpPr/>
-          <p:nvPr/>
-        </p:nvSpPr>
-        <p:spPr>
-          <a:xfrm>
-            <a:off x="566928" y="6071616"/>
             <a:ext cx="11057839" cy="0"/>
           </a:xfrm>
           <a:prstGeom prst="line">
@@ -39356,7 +39249,7 @@
                 <a:ea typeface="Courier New" pitchFamily="34" charset="-122"/>
                 <a:cs typeface="Courier New" pitchFamily="34" charset="-120"/>
               </a:rPr>
-              <a:t>Preimagen</a:t>
+              <a:t>Paradoja del cumpleaños</a:t>
             </a:r>
             <a:endParaRPr lang="en-US" sz="1050" dirty="0"/>
           </a:p>
@@ -39371,7 +39264,7 @@
         <p:spPr>
           <a:xfrm>
             <a:off x="4818888" y="1783080"/>
-            <a:ext cx="6805879" cy="512064"/>
+            <a:ext cx="6805879" cy="694944"/>
           </a:xfrm>
           <a:prstGeom prst="rect">
             <a:avLst/>
@@ -39398,7 +39291,7 @@
                 <a:ea typeface="Arial" pitchFamily="34" charset="-122"/>
                 <a:cs typeface="Arial" pitchFamily="34" charset="-120"/>
               </a:rPr>
-              <a:t>Entrada que produce un hash dado. La resistencia a preimagen exige que, conocido el hash, sea inviable hallar una entrada que lo genere.</a:t>
+              <a:t>Fenómeno por el cual hallar cualquier coincidencia dentro de un conjunto es mucho más barato que hallar una coincidencia con un elemento fijo. Explica que la resistencia a colisiones sea del orden de 2ⁿ/².</a:t>
             </a:r>
             <a:endParaRPr lang="en-US" sz="1150" dirty="0"/>
           </a:p>
@@ -39435,7 +39328,7 @@
         </p:nvSpPr>
         <p:spPr>
           <a:xfrm>
-            <a:off x="566928" y="2386584"/>
+            <a:off x="566928" y="2569464"/>
             <a:ext cx="2377440" cy="329184"/>
           </a:xfrm>
           <a:prstGeom prst="rect">
@@ -39463,7 +39356,7 @@
                 <a:ea typeface="Courier New" pitchFamily="34" charset="-122"/>
                 <a:cs typeface="Courier New" pitchFamily="34" charset="-120"/>
               </a:rPr>
-              <a:t>Prueba de inclusión</a:t>
+              <a:t>Preimagen</a:t>
             </a:r>
             <a:endParaRPr lang="en-US" sz="1050" dirty="0"/>
           </a:p>
@@ -39477,46 +39370,7 @@
         </p:nvSpPr>
         <p:spPr>
           <a:xfrm>
-            <a:off x="3035808" y="2414016"/>
-            <a:ext cx="1645920" cy="274320"/>
-          </a:xfrm>
-          <a:prstGeom prst="rect">
-            <a:avLst/>
-          </a:prstGeom>
-          <a:noFill/>
-          <a:ln/>
-        </p:spPr>
-        <p:txBody>
-          <a:bodyPr wrap="square" lIns="0" tIns="0" rIns="0" bIns="0" rtlCol="0" anchor="t"/>
-          <a:lstStyle/>
-          <a:p>
-            <a:pPr indent="0" marL="0">
-              <a:buNone/>
-            </a:pPr>
-            <a:r>
-              <a:rPr lang="en-US" sz="900" dirty="0">
-                <a:solidFill>
-                  <a:srgbClr val="5638C9"/>
-                </a:solidFill>
-                <a:latin typeface="Courier New" pitchFamily="34" charset="0"/>
-                <a:ea typeface="Courier New" pitchFamily="34" charset="-122"/>
-                <a:cs typeface="Courier New" pitchFamily="34" charset="-120"/>
-              </a:rPr>
-              <a:t>Merkle proof</a:t>
-            </a:r>
-            <a:endParaRPr lang="en-US" sz="900" dirty="0"/>
-          </a:p>
-        </p:txBody>
-      </p:sp>
-      <p:sp>
-        <p:nvSpPr>
-          <p:cNvPr id="13" name="Text 10"/>
-          <p:cNvSpPr/>
-          <p:nvPr/>
-        </p:nvSpPr>
-        <p:spPr>
-          <a:xfrm>
-            <a:off x="4818888" y="2359152"/>
+            <a:off x="4818888" y="2542032"/>
             <a:ext cx="6805879" cy="512064"/>
           </a:xfrm>
           <a:prstGeom prst="rect">
@@ -39544,7 +39398,7 @@
                 <a:ea typeface="Arial" pitchFamily="34" charset="-122"/>
                 <a:cs typeface="Arial" pitchFamily="34" charset="-120"/>
               </a:rPr>
-              <a:t>Conjunto mínimo de hashes hermanos que permite verificar que un elemento pertenece a un conjunto conociendo solo la raíz. Su tamaño crece como log₂(n).</a:t>
+              <a:t>Entrada que produce un hash dado. La resistencia a preimagen exige que, conocido el hash, sea inviable hallar una entrada que lo genere.</a:t>
             </a:r>
             <a:endParaRPr lang="en-US" sz="1150" dirty="0"/>
           </a:p>
@@ -39552,13 +39406,13 @@
       </p:sp>
       <p:sp>
         <p:nvSpPr>
-          <p:cNvPr id="14" name="Shape 11"/>
-          <p:cNvSpPr/>
-          <p:nvPr/>
-        </p:nvSpPr>
-        <p:spPr>
-          <a:xfrm>
-            <a:off x="566928" y="2276856"/>
+          <p:cNvPr id="13" name="Shape 10"/>
+          <p:cNvSpPr/>
+          <p:nvPr/>
+        </p:nvSpPr>
+        <p:spPr>
+          <a:xfrm>
+            <a:off x="566928" y="2459736"/>
             <a:ext cx="11057839" cy="0"/>
           </a:xfrm>
           <a:prstGeom prst="line">
@@ -39575,13 +39429,13 @@
       </p:sp>
       <p:sp>
         <p:nvSpPr>
-          <p:cNvPr id="15" name="Text 12"/>
-          <p:cNvSpPr/>
-          <p:nvPr/>
-        </p:nvSpPr>
-        <p:spPr>
-          <a:xfrm>
-            <a:off x="566928" y="2962656"/>
+          <p:cNvPr id="14" name="Text 11"/>
+          <p:cNvSpPr/>
+          <p:nvPr/>
+        </p:nvSpPr>
+        <p:spPr>
+          <a:xfrm>
+            <a:off x="566928" y="3145536"/>
             <a:ext cx="2377440" cy="329184"/>
           </a:xfrm>
           <a:prstGeom prst="rect">
@@ -39609,7 +39463,7 @@
                 <a:ea typeface="Courier New" pitchFamily="34" charset="-122"/>
                 <a:cs typeface="Courier New" pitchFamily="34" charset="-120"/>
               </a:rPr>
-              <a:t>Raíz de Merkle</a:t>
+              <a:t>Prueba de inclusión</a:t>
             </a:r>
             <a:endParaRPr lang="en-US" sz="1050" dirty="0"/>
           </a:p>
@@ -39617,13 +39471,13 @@
       </p:sp>
       <p:sp>
         <p:nvSpPr>
-          <p:cNvPr id="16" name="Text 13"/>
-          <p:cNvSpPr/>
-          <p:nvPr/>
-        </p:nvSpPr>
-        <p:spPr>
-          <a:xfrm>
-            <a:off x="3035808" y="2990088"/>
+          <p:cNvPr id="15" name="Text 12"/>
+          <p:cNvSpPr/>
+          <p:nvPr/>
+        </p:nvSpPr>
+        <p:spPr>
+          <a:xfrm>
+            <a:off x="3035808" y="3172968"/>
             <a:ext cx="1645920" cy="274320"/>
           </a:xfrm>
           <a:prstGeom prst="rect">
@@ -39648,7 +39502,7 @@
                 <a:ea typeface="Courier New" pitchFamily="34" charset="-122"/>
                 <a:cs typeface="Courier New" pitchFamily="34" charset="-120"/>
               </a:rPr>
-              <a:t>Merkle root</a:t>
+              <a:t>Merkle proof</a:t>
             </a:r>
             <a:endParaRPr lang="en-US" sz="900" dirty="0"/>
           </a:p>
@@ -39656,13 +39510,13 @@
       </p:sp>
       <p:sp>
         <p:nvSpPr>
-          <p:cNvPr id="17" name="Text 14"/>
-          <p:cNvSpPr/>
-          <p:nvPr/>
-        </p:nvSpPr>
-        <p:spPr>
-          <a:xfrm>
-            <a:off x="4818888" y="2935224"/>
+          <p:cNvPr id="16" name="Text 13"/>
+          <p:cNvSpPr/>
+          <p:nvPr/>
+        </p:nvSpPr>
+        <p:spPr>
+          <a:xfrm>
+            <a:off x="4818888" y="3118104"/>
             <a:ext cx="6805879" cy="512064"/>
           </a:xfrm>
           <a:prstGeom prst="rect">
@@ -39690,7 +39544,7 @@
                 <a:ea typeface="Arial" pitchFamily="34" charset="-122"/>
                 <a:cs typeface="Arial" pitchFamily="34" charset="-120"/>
               </a:rPr>
-              <a:t>Nodo superior del árbol. Compromiso sobre el conjunto completo: cambiar cualquier elemento la cambia. Es uno de los campos de la cabecera de un bloque.</a:t>
+              <a:t>Conjunto mínimo de hashes hermanos que permite verificar que un elemento pertenece a un conjunto conociendo solo la raíz. Su tamaño crece como log₂(n).</a:t>
             </a:r>
             <a:endParaRPr lang="en-US" sz="1150" dirty="0"/>
           </a:p>
@@ -39698,13 +39552,13 @@
       </p:sp>
       <p:sp>
         <p:nvSpPr>
-          <p:cNvPr id="18" name="Shape 15"/>
-          <p:cNvSpPr/>
-          <p:nvPr/>
-        </p:nvSpPr>
-        <p:spPr>
-          <a:xfrm>
-            <a:off x="566928" y="2852928"/>
+          <p:cNvPr id="17" name="Shape 14"/>
+          <p:cNvSpPr/>
+          <p:nvPr/>
+        </p:nvSpPr>
+        <p:spPr>
+          <a:xfrm>
+            <a:off x="566928" y="3035808"/>
             <a:ext cx="11057839" cy="0"/>
           </a:xfrm>
           <a:prstGeom prst="line">
@@ -39721,13 +39575,13 @@
       </p:sp>
       <p:sp>
         <p:nvSpPr>
-          <p:cNvPr id="19" name="Text 16"/>
-          <p:cNvSpPr/>
-          <p:nvPr/>
-        </p:nvSpPr>
-        <p:spPr>
-          <a:xfrm>
-            <a:off x="566928" y="3538728"/>
+          <p:cNvPr id="18" name="Text 15"/>
+          <p:cNvSpPr/>
+          <p:nvPr/>
+        </p:nvSpPr>
+        <p:spPr>
+          <a:xfrm>
+            <a:off x="566928" y="3721608"/>
             <a:ext cx="2377440" cy="329184"/>
           </a:xfrm>
           <a:prstGeom prst="rect">
@@ -39755,7 +39609,7 @@
                 <a:ea typeface="Courier New" pitchFamily="34" charset="-122"/>
                 <a:cs typeface="Courier New" pitchFamily="34" charset="-120"/>
               </a:rPr>
-              <a:t>Sal</a:t>
+              <a:t>Raíz de Merkle</a:t>
             </a:r>
             <a:endParaRPr lang="en-US" sz="1050" dirty="0"/>
           </a:p>
@@ -39763,13 +39617,13 @@
       </p:sp>
       <p:sp>
         <p:nvSpPr>
-          <p:cNvPr id="20" name="Text 17"/>
-          <p:cNvSpPr/>
-          <p:nvPr/>
-        </p:nvSpPr>
-        <p:spPr>
-          <a:xfrm>
-            <a:off x="3035808" y="3566160"/>
+          <p:cNvPr id="19" name="Text 16"/>
+          <p:cNvSpPr/>
+          <p:nvPr/>
+        </p:nvSpPr>
+        <p:spPr>
+          <a:xfrm>
+            <a:off x="3035808" y="3749040"/>
             <a:ext cx="1645920" cy="274320"/>
           </a:xfrm>
           <a:prstGeom prst="rect">
@@ -39794,7 +39648,7 @@
                 <a:ea typeface="Courier New" pitchFamily="34" charset="-122"/>
                 <a:cs typeface="Courier New" pitchFamily="34" charset="-120"/>
               </a:rPr>
-              <a:t>salt</a:t>
+              <a:t>Merkle root</a:t>
             </a:r>
             <a:endParaRPr lang="en-US" sz="900" dirty="0"/>
           </a:p>
@@ -39802,13 +39656,13 @@
       </p:sp>
       <p:sp>
         <p:nvSpPr>
-          <p:cNvPr id="21" name="Text 18"/>
-          <p:cNvSpPr/>
-          <p:nvPr/>
-        </p:nvSpPr>
-        <p:spPr>
-          <a:xfrm>
-            <a:off x="4818888" y="3511296"/>
+          <p:cNvPr id="20" name="Text 17"/>
+          <p:cNvSpPr/>
+          <p:nvPr/>
+        </p:nvSpPr>
+        <p:spPr>
+          <a:xfrm>
+            <a:off x="4818888" y="3694176"/>
             <a:ext cx="6805879" cy="512064"/>
           </a:xfrm>
           <a:prstGeom prst="rect">
@@ -39836,7 +39690,7 @@
                 <a:ea typeface="Arial" pitchFamily="34" charset="-122"/>
                 <a:cs typeface="Arial" pitchFamily="34" charset="-120"/>
               </a:rPr>
-              <a:t>Valor aleatorio que se añade a una entrada antes de hashearla para que entradas iguales produzcan salidas distintas. Imprescindible con contraseñas; no se usa en una cadena de bloques, cuyos hashes deben ser reproducibles.</a:t>
+              <a:t>Nodo superior del árbol. Compromiso sobre el conjunto completo: cambiar cualquier elemento la cambia. Es uno de los campos de la cabecera de un bloque.</a:t>
             </a:r>
             <a:endParaRPr lang="en-US" sz="1150" dirty="0"/>
           </a:p>
@@ -39844,13 +39698,13 @@
       </p:sp>
       <p:sp>
         <p:nvSpPr>
-          <p:cNvPr id="22" name="Shape 19"/>
-          <p:cNvSpPr/>
-          <p:nvPr/>
-        </p:nvSpPr>
-        <p:spPr>
-          <a:xfrm>
-            <a:off x="566928" y="3429000"/>
+          <p:cNvPr id="21" name="Shape 18"/>
+          <p:cNvSpPr/>
+          <p:nvPr/>
+        </p:nvSpPr>
+        <p:spPr>
+          <a:xfrm>
+            <a:off x="566928" y="3611880"/>
             <a:ext cx="11057839" cy="0"/>
           </a:xfrm>
           <a:prstGeom prst="line">
@@ -39867,13 +39721,13 @@
       </p:sp>
       <p:sp>
         <p:nvSpPr>
-          <p:cNvPr id="23" name="Text 20"/>
-          <p:cNvSpPr/>
-          <p:nvPr/>
-        </p:nvSpPr>
-        <p:spPr>
-          <a:xfrm>
-            <a:off x="566928" y="4114800"/>
+          <p:cNvPr id="22" name="Text 19"/>
+          <p:cNvSpPr/>
+          <p:nvPr/>
+        </p:nvSpPr>
+        <p:spPr>
+          <a:xfrm>
+            <a:off x="566928" y="4297680"/>
             <a:ext cx="2377440" cy="329184"/>
           </a:xfrm>
           <a:prstGeom prst="rect">
@@ -39901,7 +39755,7 @@
                 <a:ea typeface="Courier New" pitchFamily="34" charset="-122"/>
                 <a:cs typeface="Courier New" pitchFamily="34" charset="-120"/>
               </a:rPr>
-              <a:t>Segunda preimagen</a:t>
+              <a:t>Sal</a:t>
             </a:r>
             <a:endParaRPr lang="en-US" sz="1050" dirty="0"/>
           </a:p>
@@ -39909,14 +39763,53 @@
       </p:sp>
       <p:sp>
         <p:nvSpPr>
+          <p:cNvPr id="23" name="Text 20"/>
+          <p:cNvSpPr/>
+          <p:nvPr/>
+        </p:nvSpPr>
+        <p:spPr>
+          <a:xfrm>
+            <a:off x="3035808" y="4325112"/>
+            <a:ext cx="1645920" cy="274320"/>
+          </a:xfrm>
+          <a:prstGeom prst="rect">
+            <a:avLst/>
+          </a:prstGeom>
+          <a:noFill/>
+          <a:ln/>
+        </p:spPr>
+        <p:txBody>
+          <a:bodyPr wrap="square" lIns="0" tIns="0" rIns="0" bIns="0" rtlCol="0" anchor="t"/>
+          <a:lstStyle/>
+          <a:p>
+            <a:pPr indent="0" marL="0">
+              <a:buNone/>
+            </a:pPr>
+            <a:r>
+              <a:rPr lang="en-US" sz="900" dirty="0">
+                <a:solidFill>
+                  <a:srgbClr val="5638C9"/>
+                </a:solidFill>
+                <a:latin typeface="Courier New" pitchFamily="34" charset="0"/>
+                <a:ea typeface="Courier New" pitchFamily="34" charset="-122"/>
+                <a:cs typeface="Courier New" pitchFamily="34" charset="-120"/>
+              </a:rPr>
+              <a:t>salt</a:t>
+            </a:r>
+            <a:endParaRPr lang="en-US" sz="900" dirty="0"/>
+          </a:p>
+        </p:txBody>
+      </p:sp>
+      <p:sp>
+        <p:nvSpPr>
           <p:cNvPr id="24" name="Text 21"/>
           <p:cNvSpPr/>
           <p:nvPr/>
         </p:nvSpPr>
         <p:spPr>
           <a:xfrm>
-            <a:off x="4818888" y="4087368"/>
-            <a:ext cx="6805879" cy="512064"/>
+            <a:off x="4818888" y="4270248"/>
+            <a:ext cx="6805879" cy="694944"/>
           </a:xfrm>
           <a:prstGeom prst="rect">
             <a:avLst/>
@@ -39943,7 +39836,7 @@
                 <a:ea typeface="Arial" pitchFamily="34" charset="-122"/>
                 <a:cs typeface="Arial" pitchFamily="34" charset="-120"/>
               </a:rPr>
-              <a:t>Mensaje distinto de uno dado que produce su mismo hash. Más difícil de hallar que una colisión, porque uno de los dos mensajes está fijado.</a:t>
+              <a:t>Valor aleatorio que se añade a una entrada antes de hashearla para que entradas iguales produzcan salidas distintas. Imprescindible con contraseñas; no se usa en una cadena de bloques, cuyos hashes deben ser reproducibles.</a:t>
             </a:r>
             <a:endParaRPr lang="en-US" sz="1150" dirty="0"/>
           </a:p>
@@ -39957,7 +39850,7 @@
         </p:nvSpPr>
         <p:spPr>
           <a:xfrm>
-            <a:off x="566928" y="4005072"/>
+            <a:off x="566928" y="4187952"/>
             <a:ext cx="11057839" cy="0"/>
           </a:xfrm>
           <a:prstGeom prst="line">
@@ -39980,7 +39873,7 @@
         </p:nvSpPr>
         <p:spPr>
           <a:xfrm>
-            <a:off x="566928" y="4690872"/>
+            <a:off x="566928" y="5056632"/>
             <a:ext cx="2377440" cy="329184"/>
           </a:xfrm>
           <a:prstGeom prst="rect">
@@ -40008,7 +39901,7 @@
                 <a:ea typeface="Courier New" pitchFamily="34" charset="-122"/>
                 <a:cs typeface="Courier New" pitchFamily="34" charset="-120"/>
               </a:rPr>
-              <a:t>SHA-256</a:t>
+              <a:t>Segunda preimagen</a:t>
             </a:r>
             <a:endParaRPr lang="en-US" sz="1050" dirty="0"/>
           </a:p>
@@ -40022,7 +39915,7 @@
         </p:nvSpPr>
         <p:spPr>
           <a:xfrm>
-            <a:off x="4818888" y="4663440"/>
+            <a:off x="4818888" y="5029200"/>
             <a:ext cx="6805879" cy="512064"/>
           </a:xfrm>
           <a:prstGeom prst="rect">
@@ -40050,7 +39943,7 @@
                 <a:ea typeface="Arial" pitchFamily="34" charset="-122"/>
                 <a:cs typeface="Arial" pitchFamily="34" charset="-120"/>
               </a:rPr>
-              <a:t>Función hash de 256 bits de la familia SHA-2. La que usa Bitcoin en identificadores, árboles de Merkle y prueba de trabajo.</a:t>
+              <a:t>Mensaje distinto de uno dado que produce su mismo hash. Más difícil de hallar que una colisión, porque uno de los dos mensajes está fijado.</a:t>
             </a:r>
             <a:endParaRPr lang="en-US" sz="1150" dirty="0"/>
           </a:p>
@@ -40064,7 +39957,7 @@
         </p:nvSpPr>
         <p:spPr>
           <a:xfrm>
-            <a:off x="566928" y="4581144"/>
+            <a:off x="566928" y="4946904"/>
             <a:ext cx="11057839" cy="0"/>
           </a:xfrm>
           <a:prstGeom prst="line">
@@ -40081,13 +39974,120 @@
       </p:sp>
       <p:sp>
         <p:nvSpPr>
-          <p:cNvPr id="29" name="Shape 26"/>
-          <p:cNvSpPr/>
-          <p:nvPr/>
-        </p:nvSpPr>
-        <p:spPr>
-          <a:xfrm>
-            <a:off x="566928" y="5157216"/>
+          <p:cNvPr id="29" name="Text 26"/>
+          <p:cNvSpPr/>
+          <p:nvPr/>
+        </p:nvSpPr>
+        <p:spPr>
+          <a:xfrm>
+            <a:off x="566928" y="5632704"/>
+            <a:ext cx="2377440" cy="329184"/>
+          </a:xfrm>
+          <a:prstGeom prst="rect">
+            <a:avLst/>
+          </a:prstGeom>
+          <a:noFill/>
+          <a:ln/>
+        </p:spPr>
+        <p:txBody>
+          <a:bodyPr wrap="square" lIns="0" tIns="0" rIns="0" bIns="0" rtlCol="0" anchor="t"/>
+          <a:lstStyle/>
+          <a:p>
+            <a:pPr indent="0" marL="0">
+              <a:lnSpc>
+                <a:spcPct val="105000"/>
+              </a:lnSpc>
+              <a:buNone/>
+            </a:pPr>
+            <a:r>
+              <a:rPr lang="en-US" sz="1050" b="1" dirty="0">
+                <a:solidFill>
+                  <a:srgbClr val="0F0F11"/>
+                </a:solidFill>
+                <a:latin typeface="Courier New" pitchFamily="34" charset="0"/>
+                <a:ea typeface="Courier New" pitchFamily="34" charset="-122"/>
+                <a:cs typeface="Courier New" pitchFamily="34" charset="-120"/>
+              </a:rPr>
+              <a:t>SHA-256</a:t>
+            </a:r>
+            <a:endParaRPr lang="en-US" sz="1050" dirty="0"/>
+          </a:p>
+        </p:txBody>
+      </p:sp>
+      <p:sp>
+        <p:nvSpPr>
+          <p:cNvPr id="30" name="Text 27"/>
+          <p:cNvSpPr/>
+          <p:nvPr/>
+        </p:nvSpPr>
+        <p:spPr>
+          <a:xfrm>
+            <a:off x="4818888" y="5605272"/>
+            <a:ext cx="6805879" cy="512064"/>
+          </a:xfrm>
+          <a:prstGeom prst="rect">
+            <a:avLst/>
+          </a:prstGeom>
+          <a:noFill/>
+          <a:ln/>
+        </p:spPr>
+        <p:txBody>
+          <a:bodyPr wrap="square" lIns="0" tIns="0" rIns="0" bIns="0" rtlCol="0" anchor="t"/>
+          <a:lstStyle/>
+          <a:p>
+            <a:pPr indent="0" marL="0">
+              <a:lnSpc>
+                <a:spcPct val="124000"/>
+              </a:lnSpc>
+              <a:buNone/>
+            </a:pPr>
+            <a:r>
+              <a:rPr lang="en-US" sz="1150" dirty="0">
+                <a:solidFill>
+                  <a:srgbClr val="3A3844"/>
+                </a:solidFill>
+                <a:latin typeface="Arial" pitchFamily="34" charset="0"/>
+                <a:ea typeface="Arial" pitchFamily="34" charset="-122"/>
+                <a:cs typeface="Arial" pitchFamily="34" charset="-120"/>
+              </a:rPr>
+              <a:t>Función hash de 256 bits de la familia SHA-2. La que usa Bitcoin en identificadores, árboles de Merkle y prueba de trabajo.</a:t>
+            </a:r>
+            <a:endParaRPr lang="en-US" sz="1150" dirty="0"/>
+          </a:p>
+        </p:txBody>
+      </p:sp>
+      <p:sp>
+        <p:nvSpPr>
+          <p:cNvPr id="31" name="Shape 28"/>
+          <p:cNvSpPr/>
+          <p:nvPr/>
+        </p:nvSpPr>
+        <p:spPr>
+          <a:xfrm>
+            <a:off x="566928" y="5522976"/>
+            <a:ext cx="11057839" cy="0"/>
+          </a:xfrm>
+          <a:prstGeom prst="line">
+            <a:avLst/>
+          </a:prstGeom>
+          <a:noFill/>
+          <a:ln w="12700">
+            <a:solidFill>
+              <a:srgbClr val="D9D6E0"/>
+            </a:solidFill>
+            <a:prstDash val="solid"/>
+          </a:ln>
+        </p:spPr>
+      </p:sp>
+      <p:sp>
+        <p:nvSpPr>
+          <p:cNvPr id="32" name="Shape 29"/>
+          <p:cNvSpPr/>
+          <p:nvPr/>
+        </p:nvSpPr>
+        <p:spPr>
+          <a:xfrm>
+            <a:off x="566928" y="6099048"/>
             <a:ext cx="11057839" cy="0"/>
           </a:xfrm>
           <a:prstGeom prst="line">
